--- a/R software in decision modelling - Part 2.pptx
+++ b/R software in decision modelling - Part 2.pptx
@@ -246,7 +246,7 @@
             <a:fld id="{ABEE1EBA-AC86-4632-8267-60DAA6EE8046}" type="datetimeFigureOut">
               <a:rPr lang="nl-NL" smtClean="0"/>
               <a:pPr/>
-              <a:t>20-3-2019</a:t>
+              <a:t>22-3-2019</a:t>
             </a:fld>
             <a:endParaRPr lang="nl-NL"/>
           </a:p>
@@ -10326,7 +10326,7 @@
         <p:spPr>
           <a:xfrm>
             <a:off x="846116" y="908720"/>
-            <a:ext cx="7620000" cy="4555976"/>
+            <a:ext cx="7620000" cy="5256584"/>
           </a:xfrm>
           <a:prstGeom prst="rect">
             <a:avLst/>
@@ -10510,7 +10510,7 @@
             </a:r>
             <a:r>
               <a:rPr lang="nl-NL" dirty="0" err="1"/>
-              <a:t>function</a:t>
+              <a:t>functions</a:t>
             </a:r>
             <a:r>
               <a:rPr lang="nl-NL" dirty="0"/>
@@ -10841,6 +10841,209 @@
   <p:clrMapOvr>
     <a:masterClrMapping/>
   </p:clrMapOvr>
+  <p:timing>
+    <p:tnLst>
+      <p:par>
+        <p:cTn id="1" dur="indefinite" restart="never" nodeType="tmRoot">
+          <p:childTnLst>
+            <p:seq concurrent="1" nextAc="seek">
+              <p:cTn id="2" dur="indefinite" nodeType="mainSeq">
+                <p:childTnLst>
+                  <p:par>
+                    <p:cTn id="3" fill="hold">
+                      <p:stCondLst>
+                        <p:cond delay="indefinite"/>
+                      </p:stCondLst>
+                      <p:childTnLst>
+                        <p:par>
+                          <p:cTn id="4" fill="hold">
+                            <p:stCondLst>
+                              <p:cond delay="0"/>
+                            </p:stCondLst>
+                            <p:childTnLst>
+                              <p:par>
+                                <p:cTn id="5" presetID="1" presetClass="entr" presetSubtype="0" fill="hold" nodeType="clickEffect">
+                                  <p:stCondLst>
+                                    <p:cond delay="0"/>
+                                  </p:stCondLst>
+                                  <p:childTnLst>
+                                    <p:set>
+                                      <p:cBhvr>
+                                        <p:cTn id="6" dur="1" fill="hold">
+                                          <p:stCondLst>
+                                            <p:cond delay="0"/>
+                                          </p:stCondLst>
+                                        </p:cTn>
+                                        <p:tgtEl>
+                                          <p:spTgt spid="3">
+                                            <p:txEl>
+                                              <p:pRg st="6" end="6"/>
+                                            </p:txEl>
+                                          </p:spTgt>
+                                        </p:tgtEl>
+                                        <p:attrNameLst>
+                                          <p:attrName>style.visibility</p:attrName>
+                                        </p:attrNameLst>
+                                      </p:cBhvr>
+                                      <p:to>
+                                        <p:strVal val="visible"/>
+                                      </p:to>
+                                    </p:set>
+                                  </p:childTnLst>
+                                </p:cTn>
+                              </p:par>
+                              <p:par>
+                                <p:cTn id="7" presetID="1" presetClass="entr" presetSubtype="0" fill="hold" nodeType="withEffect">
+                                  <p:stCondLst>
+                                    <p:cond delay="0"/>
+                                  </p:stCondLst>
+                                  <p:childTnLst>
+                                    <p:set>
+                                      <p:cBhvr>
+                                        <p:cTn id="8" dur="1" fill="hold">
+                                          <p:stCondLst>
+                                            <p:cond delay="0"/>
+                                          </p:stCondLst>
+                                        </p:cTn>
+                                        <p:tgtEl>
+                                          <p:spTgt spid="3">
+                                            <p:txEl>
+                                              <p:pRg st="7" end="7"/>
+                                            </p:txEl>
+                                          </p:spTgt>
+                                        </p:tgtEl>
+                                        <p:attrNameLst>
+                                          <p:attrName>style.visibility</p:attrName>
+                                        </p:attrNameLst>
+                                      </p:cBhvr>
+                                      <p:to>
+                                        <p:strVal val="visible"/>
+                                      </p:to>
+                                    </p:set>
+                                  </p:childTnLst>
+                                </p:cTn>
+                              </p:par>
+                              <p:par>
+                                <p:cTn id="9" presetID="1" presetClass="entr" presetSubtype="0" fill="hold" nodeType="withEffect">
+                                  <p:stCondLst>
+                                    <p:cond delay="0"/>
+                                  </p:stCondLst>
+                                  <p:childTnLst>
+                                    <p:set>
+                                      <p:cBhvr>
+                                        <p:cTn id="10" dur="1" fill="hold">
+                                          <p:stCondLst>
+                                            <p:cond delay="0"/>
+                                          </p:stCondLst>
+                                        </p:cTn>
+                                        <p:tgtEl>
+                                          <p:spTgt spid="3">
+                                            <p:txEl>
+                                              <p:pRg st="8" end="8"/>
+                                            </p:txEl>
+                                          </p:spTgt>
+                                        </p:tgtEl>
+                                        <p:attrNameLst>
+                                          <p:attrName>style.visibility</p:attrName>
+                                        </p:attrNameLst>
+                                      </p:cBhvr>
+                                      <p:to>
+                                        <p:strVal val="visible"/>
+                                      </p:to>
+                                    </p:set>
+                                  </p:childTnLst>
+                                </p:cTn>
+                              </p:par>
+                              <p:par>
+                                <p:cTn id="11" presetID="1" presetClass="entr" presetSubtype="0" fill="hold" nodeType="withEffect">
+                                  <p:stCondLst>
+                                    <p:cond delay="0"/>
+                                  </p:stCondLst>
+                                  <p:childTnLst>
+                                    <p:set>
+                                      <p:cBhvr>
+                                        <p:cTn id="12" dur="1" fill="hold">
+                                          <p:stCondLst>
+                                            <p:cond delay="0"/>
+                                          </p:stCondLst>
+                                        </p:cTn>
+                                        <p:tgtEl>
+                                          <p:spTgt spid="3">
+                                            <p:txEl>
+                                              <p:pRg st="9" end="9"/>
+                                            </p:txEl>
+                                          </p:spTgt>
+                                        </p:tgtEl>
+                                        <p:attrNameLst>
+                                          <p:attrName>style.visibility</p:attrName>
+                                        </p:attrNameLst>
+                                      </p:cBhvr>
+                                      <p:to>
+                                        <p:strVal val="visible"/>
+                                      </p:to>
+                                    </p:set>
+                                  </p:childTnLst>
+                                </p:cTn>
+                              </p:par>
+                              <p:par>
+                                <p:cTn id="13" presetID="1" presetClass="entr" presetSubtype="0" fill="hold" nodeType="withEffect">
+                                  <p:stCondLst>
+                                    <p:cond delay="0"/>
+                                  </p:stCondLst>
+                                  <p:childTnLst>
+                                    <p:set>
+                                      <p:cBhvr>
+                                        <p:cTn id="14" dur="1" fill="hold">
+                                          <p:stCondLst>
+                                            <p:cond delay="0"/>
+                                          </p:stCondLst>
+                                        </p:cTn>
+                                        <p:tgtEl>
+                                          <p:spTgt spid="3">
+                                            <p:txEl>
+                                              <p:pRg st="10" end="10"/>
+                                            </p:txEl>
+                                          </p:spTgt>
+                                        </p:tgtEl>
+                                        <p:attrNameLst>
+                                          <p:attrName>style.visibility</p:attrName>
+                                        </p:attrNameLst>
+                                      </p:cBhvr>
+                                      <p:to>
+                                        <p:strVal val="visible"/>
+                                      </p:to>
+                                    </p:set>
+                                  </p:childTnLst>
+                                </p:cTn>
+                              </p:par>
+                            </p:childTnLst>
+                          </p:cTn>
+                        </p:par>
+                      </p:childTnLst>
+                    </p:cTn>
+                  </p:par>
+                </p:childTnLst>
+              </p:cTn>
+              <p:prevCondLst>
+                <p:cond evt="onPrev" delay="0">
+                  <p:tgtEl>
+                    <p:sldTgt/>
+                  </p:tgtEl>
+                </p:cond>
+              </p:prevCondLst>
+              <p:nextCondLst>
+                <p:cond evt="onNext" delay="0">
+                  <p:tgtEl>
+                    <p:sldTgt/>
+                  </p:tgtEl>
+                </p:cond>
+              </p:nextCondLst>
+            </p:seq>
+          </p:childTnLst>
+        </p:cTn>
+      </p:par>
+    </p:tnLst>
+  </p:timing>
 </p:sld>
 </file>
 
@@ -11290,7 +11493,7 @@
             </a:pPr>
             <a:r>
               <a:rPr lang="nl-NL" sz="1400" i="1" dirty="0" err="1"/>
-              <a:t>Df.psa</a:t>
+              <a:t>df.psa</a:t>
             </a:r>
             <a:r>
               <a:rPr lang="nl-NL" sz="1400" i="1" dirty="0"/>
@@ -11406,7 +11609,7 @@
             </a:pPr>
             <a:r>
               <a:rPr lang="nl-NL" sz="1400" i="1" dirty="0"/>
-              <a:t>Return(</a:t>
+              <a:t>return(</a:t>
             </a:r>
             <a:r>
               <a:rPr lang="nl-NL" sz="1400" i="1" dirty="0" err="1"/>
@@ -11446,7 +11649,7 @@
             </a:pPr>
             <a:r>
               <a:rPr lang="nl-NL" sz="1400" i="1" dirty="0" err="1"/>
-              <a:t>gen.psa</a:t>
+              <a:t>Inputfunction</a:t>
             </a:r>
             <a:r>
               <a:rPr lang="nl-NL" sz="1400" i="1" dirty="0"/>
@@ -11511,6 +11714,351 @@
   <p:clrMapOvr>
     <a:masterClrMapping/>
   </p:clrMapOvr>
+  <p:timing>
+    <p:tnLst>
+      <p:par>
+        <p:cTn id="1" dur="indefinite" restart="never" nodeType="tmRoot">
+          <p:childTnLst>
+            <p:seq concurrent="1" nextAc="seek">
+              <p:cTn id="2" dur="indefinite" nodeType="mainSeq">
+                <p:childTnLst>
+                  <p:par>
+                    <p:cTn id="3" fill="hold">
+                      <p:stCondLst>
+                        <p:cond delay="indefinite"/>
+                      </p:stCondLst>
+                      <p:childTnLst>
+                        <p:par>
+                          <p:cTn id="4" fill="hold">
+                            <p:stCondLst>
+                              <p:cond delay="0"/>
+                            </p:stCondLst>
+                            <p:childTnLst>
+                              <p:par>
+                                <p:cTn id="5" presetID="1" presetClass="entr" presetSubtype="0" fill="hold" nodeType="clickEffect">
+                                  <p:stCondLst>
+                                    <p:cond delay="0"/>
+                                  </p:stCondLst>
+                                  <p:childTnLst>
+                                    <p:set>
+                                      <p:cBhvr>
+                                        <p:cTn id="6" dur="1" fill="hold">
+                                          <p:stCondLst>
+                                            <p:cond delay="0"/>
+                                          </p:stCondLst>
+                                        </p:cTn>
+                                        <p:tgtEl>
+                                          <p:spTgt spid="3">
+                                            <p:txEl>
+                                              <p:pRg st="4" end="4"/>
+                                            </p:txEl>
+                                          </p:spTgt>
+                                        </p:tgtEl>
+                                        <p:attrNameLst>
+                                          <p:attrName>style.visibility</p:attrName>
+                                        </p:attrNameLst>
+                                      </p:cBhvr>
+                                      <p:to>
+                                        <p:strVal val="visible"/>
+                                      </p:to>
+                                    </p:set>
+                                  </p:childTnLst>
+                                </p:cTn>
+                              </p:par>
+                              <p:par>
+                                <p:cTn id="7" presetID="1" presetClass="entr" presetSubtype="0" fill="hold" nodeType="withEffect">
+                                  <p:stCondLst>
+                                    <p:cond delay="0"/>
+                                  </p:stCondLst>
+                                  <p:childTnLst>
+                                    <p:set>
+                                      <p:cBhvr>
+                                        <p:cTn id="8" dur="1" fill="hold">
+                                          <p:stCondLst>
+                                            <p:cond delay="0"/>
+                                          </p:stCondLst>
+                                        </p:cTn>
+                                        <p:tgtEl>
+                                          <p:spTgt spid="3">
+                                            <p:txEl>
+                                              <p:pRg st="5" end="5"/>
+                                            </p:txEl>
+                                          </p:spTgt>
+                                        </p:tgtEl>
+                                        <p:attrNameLst>
+                                          <p:attrName>style.visibility</p:attrName>
+                                        </p:attrNameLst>
+                                      </p:cBhvr>
+                                      <p:to>
+                                        <p:strVal val="visible"/>
+                                      </p:to>
+                                    </p:set>
+                                  </p:childTnLst>
+                                </p:cTn>
+                              </p:par>
+                              <p:par>
+                                <p:cTn id="9" presetID="1" presetClass="entr" presetSubtype="0" fill="hold" nodeType="withEffect">
+                                  <p:stCondLst>
+                                    <p:cond delay="0"/>
+                                  </p:stCondLst>
+                                  <p:childTnLst>
+                                    <p:set>
+                                      <p:cBhvr>
+                                        <p:cTn id="10" dur="1" fill="hold">
+                                          <p:stCondLst>
+                                            <p:cond delay="0"/>
+                                          </p:stCondLst>
+                                        </p:cTn>
+                                        <p:tgtEl>
+                                          <p:spTgt spid="3">
+                                            <p:txEl>
+                                              <p:pRg st="6" end="6"/>
+                                            </p:txEl>
+                                          </p:spTgt>
+                                        </p:tgtEl>
+                                        <p:attrNameLst>
+                                          <p:attrName>style.visibility</p:attrName>
+                                        </p:attrNameLst>
+                                      </p:cBhvr>
+                                      <p:to>
+                                        <p:strVal val="visible"/>
+                                      </p:to>
+                                    </p:set>
+                                  </p:childTnLst>
+                                </p:cTn>
+                              </p:par>
+                              <p:par>
+                                <p:cTn id="11" presetID="1" presetClass="entr" presetSubtype="0" fill="hold" nodeType="withEffect">
+                                  <p:stCondLst>
+                                    <p:cond delay="0"/>
+                                  </p:stCondLst>
+                                  <p:childTnLst>
+                                    <p:set>
+                                      <p:cBhvr>
+                                        <p:cTn id="12" dur="1" fill="hold">
+                                          <p:stCondLst>
+                                            <p:cond delay="0"/>
+                                          </p:stCondLst>
+                                        </p:cTn>
+                                        <p:tgtEl>
+                                          <p:spTgt spid="3">
+                                            <p:txEl>
+                                              <p:pRg st="7" end="7"/>
+                                            </p:txEl>
+                                          </p:spTgt>
+                                        </p:tgtEl>
+                                        <p:attrNameLst>
+                                          <p:attrName>style.visibility</p:attrName>
+                                        </p:attrNameLst>
+                                      </p:cBhvr>
+                                      <p:to>
+                                        <p:strVal val="visible"/>
+                                      </p:to>
+                                    </p:set>
+                                  </p:childTnLst>
+                                </p:cTn>
+                              </p:par>
+                              <p:par>
+                                <p:cTn id="13" presetID="1" presetClass="entr" presetSubtype="0" fill="hold" nodeType="withEffect">
+                                  <p:stCondLst>
+                                    <p:cond delay="0"/>
+                                  </p:stCondLst>
+                                  <p:childTnLst>
+                                    <p:set>
+                                      <p:cBhvr>
+                                        <p:cTn id="14" dur="1" fill="hold">
+                                          <p:stCondLst>
+                                            <p:cond delay="0"/>
+                                          </p:stCondLst>
+                                        </p:cTn>
+                                        <p:tgtEl>
+                                          <p:spTgt spid="3">
+                                            <p:txEl>
+                                              <p:pRg st="8" end="8"/>
+                                            </p:txEl>
+                                          </p:spTgt>
+                                        </p:tgtEl>
+                                        <p:attrNameLst>
+                                          <p:attrName>style.visibility</p:attrName>
+                                        </p:attrNameLst>
+                                      </p:cBhvr>
+                                      <p:to>
+                                        <p:strVal val="visible"/>
+                                      </p:to>
+                                    </p:set>
+                                  </p:childTnLst>
+                                </p:cTn>
+                              </p:par>
+                              <p:par>
+                                <p:cTn id="15" presetID="1" presetClass="entr" presetSubtype="0" fill="hold" nodeType="withEffect">
+                                  <p:stCondLst>
+                                    <p:cond delay="0"/>
+                                  </p:stCondLst>
+                                  <p:childTnLst>
+                                    <p:set>
+                                      <p:cBhvr>
+                                        <p:cTn id="16" dur="1" fill="hold">
+                                          <p:stCondLst>
+                                            <p:cond delay="0"/>
+                                          </p:stCondLst>
+                                        </p:cTn>
+                                        <p:tgtEl>
+                                          <p:spTgt spid="3">
+                                            <p:txEl>
+                                              <p:pRg st="9" end="9"/>
+                                            </p:txEl>
+                                          </p:spTgt>
+                                        </p:tgtEl>
+                                        <p:attrNameLst>
+                                          <p:attrName>style.visibility</p:attrName>
+                                        </p:attrNameLst>
+                                      </p:cBhvr>
+                                      <p:to>
+                                        <p:strVal val="visible"/>
+                                      </p:to>
+                                    </p:set>
+                                  </p:childTnLst>
+                                </p:cTn>
+                              </p:par>
+                              <p:par>
+                                <p:cTn id="17" presetID="1" presetClass="entr" presetSubtype="0" fill="hold" nodeType="withEffect">
+                                  <p:stCondLst>
+                                    <p:cond delay="0"/>
+                                  </p:stCondLst>
+                                  <p:childTnLst>
+                                    <p:set>
+                                      <p:cBhvr>
+                                        <p:cTn id="18" dur="1" fill="hold">
+                                          <p:stCondLst>
+                                            <p:cond delay="0"/>
+                                          </p:stCondLst>
+                                        </p:cTn>
+                                        <p:tgtEl>
+                                          <p:spTgt spid="3">
+                                            <p:txEl>
+                                              <p:pRg st="10" end="10"/>
+                                            </p:txEl>
+                                          </p:spTgt>
+                                        </p:tgtEl>
+                                        <p:attrNameLst>
+                                          <p:attrName>style.visibility</p:attrName>
+                                        </p:attrNameLst>
+                                      </p:cBhvr>
+                                      <p:to>
+                                        <p:strVal val="visible"/>
+                                      </p:to>
+                                    </p:set>
+                                  </p:childTnLst>
+                                </p:cTn>
+                              </p:par>
+                              <p:par>
+                                <p:cTn id="19" presetID="1" presetClass="entr" presetSubtype="0" fill="hold" nodeType="withEffect">
+                                  <p:stCondLst>
+                                    <p:cond delay="0"/>
+                                  </p:stCondLst>
+                                  <p:childTnLst>
+                                    <p:set>
+                                      <p:cBhvr>
+                                        <p:cTn id="20" dur="1" fill="hold">
+                                          <p:stCondLst>
+                                            <p:cond delay="0"/>
+                                          </p:stCondLst>
+                                        </p:cTn>
+                                        <p:tgtEl>
+                                          <p:spTgt spid="3">
+                                            <p:txEl>
+                                              <p:pRg st="11" end="11"/>
+                                            </p:txEl>
+                                          </p:spTgt>
+                                        </p:tgtEl>
+                                        <p:attrNameLst>
+                                          <p:attrName>style.visibility</p:attrName>
+                                        </p:attrNameLst>
+                                      </p:cBhvr>
+                                      <p:to>
+                                        <p:strVal val="visible"/>
+                                      </p:to>
+                                    </p:set>
+                                  </p:childTnLst>
+                                </p:cTn>
+                              </p:par>
+                            </p:childTnLst>
+                          </p:cTn>
+                        </p:par>
+                      </p:childTnLst>
+                    </p:cTn>
+                  </p:par>
+                  <p:par>
+                    <p:cTn id="21" fill="hold">
+                      <p:stCondLst>
+                        <p:cond delay="indefinite"/>
+                      </p:stCondLst>
+                      <p:childTnLst>
+                        <p:par>
+                          <p:cTn id="22" fill="hold">
+                            <p:stCondLst>
+                              <p:cond delay="0"/>
+                            </p:stCondLst>
+                            <p:childTnLst>
+                              <p:par>
+                                <p:cTn id="23" presetID="1" presetClass="entr" presetSubtype="0" fill="hold" nodeType="clickEffect">
+                                  <p:stCondLst>
+                                    <p:cond delay="0"/>
+                                  </p:stCondLst>
+                                  <p:childTnLst>
+                                    <p:set>
+                                      <p:cBhvr>
+                                        <p:cTn id="24" dur="1" fill="hold">
+                                          <p:stCondLst>
+                                            <p:cond delay="0"/>
+                                          </p:stCondLst>
+                                        </p:cTn>
+                                        <p:tgtEl>
+                                          <p:spTgt spid="3">
+                                            <p:txEl>
+                                              <p:pRg st="12" end="12"/>
+                                            </p:txEl>
+                                          </p:spTgt>
+                                        </p:tgtEl>
+                                        <p:attrNameLst>
+                                          <p:attrName>style.visibility</p:attrName>
+                                        </p:attrNameLst>
+                                      </p:cBhvr>
+                                      <p:to>
+                                        <p:strVal val="visible"/>
+                                      </p:to>
+                                    </p:set>
+                                  </p:childTnLst>
+                                </p:cTn>
+                              </p:par>
+                            </p:childTnLst>
+                          </p:cTn>
+                        </p:par>
+                      </p:childTnLst>
+                    </p:cTn>
+                  </p:par>
+                </p:childTnLst>
+              </p:cTn>
+              <p:prevCondLst>
+                <p:cond evt="onPrev" delay="0">
+                  <p:tgtEl>
+                    <p:sldTgt/>
+                  </p:tgtEl>
+                </p:cond>
+              </p:prevCondLst>
+              <p:nextCondLst>
+                <p:cond evt="onNext" delay="0">
+                  <p:tgtEl>
+                    <p:sldTgt/>
+                  </p:tgtEl>
+                </p:cond>
+              </p:nextCondLst>
+            </p:seq>
+          </p:childTnLst>
+        </p:cTn>
+      </p:par>
+    </p:tnLst>
+  </p:timing>
 </p:sld>
 </file>
 
@@ -11762,35 +12310,67 @@
               <a:buAutoNum type="arabicPeriod"/>
             </a:pPr>
             <a:r>
-              <a:rPr lang="nl-NL" dirty="0" err="1"/>
+              <a:rPr lang="nl-NL" dirty="0" err="1">
+                <a:solidFill>
+                  <a:schemeClr val="bg1"/>
+                </a:solidFill>
+              </a:rPr>
               <a:t>Define</a:t>
             </a:r>
             <a:r>
-              <a:rPr lang="nl-NL" dirty="0"/>
+              <a:rPr lang="nl-NL" dirty="0">
+                <a:solidFill>
+                  <a:schemeClr val="bg1"/>
+                </a:solidFill>
+              </a:rPr>
               <a:t> </a:t>
             </a:r>
             <a:r>
-              <a:rPr lang="nl-NL" dirty="0" err="1"/>
+              <a:rPr lang="nl-NL" dirty="0" err="1">
+                <a:solidFill>
+                  <a:schemeClr val="bg1"/>
+                </a:solidFill>
+              </a:rPr>
               <a:t>healthstates</a:t>
             </a:r>
             <a:r>
-              <a:rPr lang="nl-NL" dirty="0"/>
+              <a:rPr lang="nl-NL" dirty="0">
+                <a:solidFill>
+                  <a:schemeClr val="bg1"/>
+                </a:solidFill>
+              </a:rPr>
               <a:t>, </a:t>
             </a:r>
             <a:r>
-              <a:rPr lang="nl-NL" dirty="0" err="1"/>
+              <a:rPr lang="nl-NL" dirty="0" err="1">
+                <a:solidFill>
+                  <a:schemeClr val="bg1"/>
+                </a:solidFill>
+              </a:rPr>
               <a:t>cycle</a:t>
             </a:r>
             <a:r>
-              <a:rPr lang="nl-NL" dirty="0"/>
+              <a:rPr lang="nl-NL" dirty="0">
+                <a:solidFill>
+                  <a:schemeClr val="bg1"/>
+                </a:solidFill>
+              </a:rPr>
               <a:t> </a:t>
             </a:r>
             <a:r>
-              <a:rPr lang="nl-NL" dirty="0" err="1"/>
+              <a:rPr lang="nl-NL" dirty="0" err="1">
+                <a:solidFill>
+                  <a:schemeClr val="bg1"/>
+                </a:solidFill>
+              </a:rPr>
               <a:t>length</a:t>
             </a:r>
             <a:r>
-              <a:rPr lang="nl-NL" dirty="0"/>
+              <a:rPr lang="nl-NL" dirty="0">
+                <a:solidFill>
+                  <a:schemeClr val="bg1"/>
+                </a:solidFill>
+              </a:rPr>
               <a:t> etc.</a:t>
             </a:r>
           </a:p>
@@ -11804,19 +12384,35 @@
               <a:buAutoNum type="arabicPeriod"/>
             </a:pPr>
             <a:r>
-              <a:rPr lang="nl-NL" dirty="0" err="1"/>
+              <a:rPr lang="nl-NL" dirty="0" err="1">
+                <a:solidFill>
+                  <a:schemeClr val="bg1"/>
+                </a:solidFill>
+              </a:rPr>
               <a:t>Initialize</a:t>
             </a:r>
             <a:r>
-              <a:rPr lang="nl-NL" dirty="0"/>
+              <a:rPr lang="nl-NL" dirty="0">
+                <a:solidFill>
+                  <a:schemeClr val="bg1"/>
+                </a:solidFill>
+              </a:rPr>
               <a:t> input </a:t>
             </a:r>
             <a:r>
-              <a:rPr lang="nl-NL" dirty="0" err="1"/>
+              <a:rPr lang="nl-NL" dirty="0" err="1">
+                <a:solidFill>
+                  <a:schemeClr val="bg1"/>
+                </a:solidFill>
+              </a:rPr>
               <a:t>function</a:t>
             </a:r>
             <a:r>
-              <a:rPr lang="nl-NL" dirty="0"/>
+              <a:rPr lang="nl-NL" dirty="0">
+                <a:solidFill>
+                  <a:schemeClr val="bg1"/>
+                </a:solidFill>
+              </a:rPr>
               <a:t> </a:t>
             </a:r>
           </a:p>
@@ -11830,35 +12426,67 @@
               <a:buAutoNum type="arabicPeriod"/>
             </a:pPr>
             <a:r>
-              <a:rPr lang="nl-NL" dirty="0" err="1"/>
+              <a:rPr lang="nl-NL" dirty="0" err="1">
+                <a:solidFill>
+                  <a:schemeClr val="bg1"/>
+                </a:solidFill>
+              </a:rPr>
               <a:t>Initialize</a:t>
             </a:r>
             <a:r>
-              <a:rPr lang="nl-NL" dirty="0"/>
+              <a:rPr lang="nl-NL" dirty="0">
+                <a:solidFill>
+                  <a:schemeClr val="bg1"/>
+                </a:solidFill>
+              </a:rPr>
               <a:t> model </a:t>
             </a:r>
             <a:r>
-              <a:rPr lang="nl-NL" dirty="0" err="1"/>
+              <a:rPr lang="nl-NL" dirty="0" err="1">
+                <a:solidFill>
+                  <a:schemeClr val="bg1"/>
+                </a:solidFill>
+              </a:rPr>
               <a:t>function</a:t>
             </a:r>
             <a:r>
-              <a:rPr lang="nl-NL" dirty="0"/>
+              <a:rPr lang="nl-NL" dirty="0">
+                <a:solidFill>
+                  <a:schemeClr val="bg1"/>
+                </a:solidFill>
+              </a:rPr>
               <a:t> (</a:t>
             </a:r>
             <a:r>
-              <a:rPr lang="nl-NL" dirty="0" err="1"/>
+              <a:rPr lang="nl-NL" dirty="0" err="1">
+                <a:solidFill>
+                  <a:schemeClr val="bg1"/>
+                </a:solidFill>
+              </a:rPr>
               <a:t>initialize</a:t>
             </a:r>
             <a:r>
-              <a:rPr lang="nl-NL" dirty="0"/>
+              <a:rPr lang="nl-NL" dirty="0">
+                <a:solidFill>
+                  <a:schemeClr val="bg1"/>
+                </a:solidFill>
+              </a:rPr>
               <a:t>, run </a:t>
             </a:r>
             <a:r>
-              <a:rPr lang="nl-NL" dirty="0" err="1"/>
+              <a:rPr lang="nl-NL" dirty="0" err="1">
+                <a:solidFill>
+                  <a:schemeClr val="bg1"/>
+                </a:solidFill>
+              </a:rPr>
               <a:t>and</a:t>
             </a:r>
             <a:r>
-              <a:rPr lang="nl-NL" dirty="0"/>
+              <a:rPr lang="nl-NL" dirty="0">
+                <a:solidFill>
+                  <a:schemeClr val="bg1"/>
+                </a:solidFill>
+              </a:rPr>
               <a:t> output model)</a:t>
             </a:r>
           </a:p>
@@ -11872,43 +12500,83 @@
               <a:buAutoNum type="arabicPeriod"/>
             </a:pPr>
             <a:r>
-              <a:rPr lang="nl-NL" dirty="0"/>
+              <a:rPr lang="nl-NL" dirty="0">
+                <a:solidFill>
+                  <a:schemeClr val="bg1"/>
+                </a:solidFill>
+              </a:rPr>
               <a:t>Run input </a:t>
             </a:r>
             <a:r>
-              <a:rPr lang="nl-NL" dirty="0" err="1"/>
+              <a:rPr lang="nl-NL" dirty="0" err="1">
+                <a:solidFill>
+                  <a:schemeClr val="bg1"/>
+                </a:solidFill>
+              </a:rPr>
               <a:t>function</a:t>
             </a:r>
             <a:r>
-              <a:rPr lang="nl-NL" dirty="0"/>
+              <a:rPr lang="nl-NL" dirty="0">
+                <a:solidFill>
+                  <a:schemeClr val="bg1"/>
+                </a:solidFill>
+              </a:rPr>
               <a:t> </a:t>
             </a:r>
             <a:r>
-              <a:rPr lang="nl-NL" i="1" dirty="0" err="1"/>
+              <a:rPr lang="nl-NL" i="1" dirty="0" err="1">
+                <a:solidFill>
+                  <a:schemeClr val="bg1"/>
+                </a:solidFill>
+              </a:rPr>
               <a:t>n.sim</a:t>
             </a:r>
             <a:r>
-              <a:rPr lang="nl-NL" dirty="0" err="1"/>
+              <a:rPr lang="nl-NL" dirty="0" err="1">
+                <a:solidFill>
+                  <a:schemeClr val="bg1"/>
+                </a:solidFill>
+              </a:rPr>
               <a:t>-times</a:t>
             </a:r>
             <a:r>
-              <a:rPr lang="nl-NL" dirty="0"/>
+              <a:rPr lang="nl-NL" dirty="0">
+                <a:solidFill>
+                  <a:schemeClr val="bg1"/>
+                </a:solidFill>
+              </a:rPr>
               <a:t> (draws </a:t>
             </a:r>
             <a:r>
-              <a:rPr lang="nl-NL" dirty="0" err="1"/>
+              <a:rPr lang="nl-NL" dirty="0" err="1">
+                <a:solidFill>
+                  <a:schemeClr val="bg1"/>
+                </a:solidFill>
+              </a:rPr>
               <a:t>from</a:t>
             </a:r>
             <a:r>
-              <a:rPr lang="nl-NL" dirty="0"/>
+              <a:rPr lang="nl-NL" dirty="0">
+                <a:solidFill>
+                  <a:schemeClr val="bg1"/>
+                </a:solidFill>
+              </a:rPr>
               <a:t> </a:t>
             </a:r>
             <a:r>
-              <a:rPr lang="nl-NL" dirty="0" err="1"/>
+              <a:rPr lang="nl-NL" dirty="0" err="1">
+                <a:solidFill>
+                  <a:schemeClr val="bg1"/>
+                </a:solidFill>
+              </a:rPr>
               <a:t>distributions</a:t>
             </a:r>
             <a:r>
-              <a:rPr lang="nl-NL" dirty="0"/>
+              <a:rPr lang="nl-NL" dirty="0">
+                <a:solidFill>
+                  <a:schemeClr val="bg1"/>
+                </a:solidFill>
+              </a:rPr>
               <a:t>)</a:t>
             </a:r>
           </a:p>
@@ -11922,11 +12590,19 @@
               <a:buAutoNum type="arabicPeriod"/>
             </a:pPr>
             <a:r>
-              <a:rPr lang="nl-NL" dirty="0" err="1"/>
+              <a:rPr lang="nl-NL" dirty="0" err="1">
+                <a:solidFill>
+                  <a:schemeClr val="bg1"/>
+                </a:solidFill>
+              </a:rPr>
               <a:t>Initialize</a:t>
             </a:r>
             <a:r>
-              <a:rPr lang="nl-NL" dirty="0"/>
+              <a:rPr lang="nl-NL" dirty="0">
+                <a:solidFill>
+                  <a:schemeClr val="bg1"/>
+                </a:solidFill>
+              </a:rPr>
               <a:t> output matrix</a:t>
             </a:r>
           </a:p>
@@ -11940,71 +12616,139 @@
               <a:buAutoNum type="arabicPeriod"/>
             </a:pPr>
             <a:r>
-              <a:rPr lang="nl-NL" dirty="0"/>
+              <a:rPr lang="nl-NL" dirty="0">
+                <a:solidFill>
+                  <a:schemeClr val="bg1"/>
+                </a:solidFill>
+              </a:rPr>
               <a:t>Run model </a:t>
             </a:r>
             <a:r>
-              <a:rPr lang="nl-NL" dirty="0" err="1"/>
+              <a:rPr lang="nl-NL" dirty="0" err="1">
+                <a:solidFill>
+                  <a:schemeClr val="bg1"/>
+                </a:solidFill>
+              </a:rPr>
               <a:t>function</a:t>
             </a:r>
             <a:r>
-              <a:rPr lang="nl-NL" dirty="0"/>
+              <a:rPr lang="nl-NL" dirty="0">
+                <a:solidFill>
+                  <a:schemeClr val="bg1"/>
+                </a:solidFill>
+              </a:rPr>
               <a:t> </a:t>
             </a:r>
             <a:r>
-              <a:rPr lang="nl-NL" dirty="0" err="1"/>
+              <a:rPr lang="nl-NL" dirty="0" err="1">
+                <a:solidFill>
+                  <a:schemeClr val="bg1"/>
+                </a:solidFill>
+              </a:rPr>
               <a:t>with</a:t>
             </a:r>
             <a:r>
-              <a:rPr lang="nl-NL" dirty="0"/>
+              <a:rPr lang="nl-NL" dirty="0">
+                <a:solidFill>
+                  <a:schemeClr val="bg1"/>
+                </a:solidFill>
+              </a:rPr>
               <a:t> </a:t>
             </a:r>
             <a:r>
-              <a:rPr lang="nl-NL" dirty="0" err="1"/>
+              <a:rPr lang="nl-NL" dirty="0" err="1">
+                <a:solidFill>
+                  <a:schemeClr val="bg1"/>
+                </a:solidFill>
+              </a:rPr>
               <a:t>result</a:t>
             </a:r>
             <a:r>
-              <a:rPr lang="nl-NL" dirty="0"/>
+              <a:rPr lang="nl-NL" dirty="0">
+                <a:solidFill>
+                  <a:schemeClr val="bg1"/>
+                </a:solidFill>
+              </a:rPr>
               <a:t> </a:t>
             </a:r>
             <a:r>
-              <a:rPr lang="nl-NL" dirty="0" err="1"/>
+              <a:rPr lang="nl-NL" dirty="0" err="1">
+                <a:solidFill>
+                  <a:schemeClr val="bg1"/>
+                </a:solidFill>
+              </a:rPr>
               <a:t>from</a:t>
             </a:r>
             <a:r>
-              <a:rPr lang="nl-NL" dirty="0"/>
+              <a:rPr lang="nl-NL" dirty="0">
+                <a:solidFill>
+                  <a:schemeClr val="bg1"/>
+                </a:solidFill>
+              </a:rPr>
               <a:t> input </a:t>
             </a:r>
             <a:r>
-              <a:rPr lang="nl-NL" dirty="0" err="1"/>
+              <a:rPr lang="nl-NL" dirty="0" err="1">
+                <a:solidFill>
+                  <a:schemeClr val="bg1"/>
+                </a:solidFill>
+              </a:rPr>
               <a:t>function</a:t>
             </a:r>
             <a:r>
-              <a:rPr lang="nl-NL" dirty="0"/>
+              <a:rPr lang="nl-NL" dirty="0">
+                <a:solidFill>
+                  <a:schemeClr val="bg1"/>
+                </a:solidFill>
+              </a:rPr>
               <a:t> </a:t>
             </a:r>
             <a:r>
-              <a:rPr lang="nl-NL" dirty="0" err="1"/>
+              <a:rPr lang="nl-NL" dirty="0" err="1">
+                <a:solidFill>
+                  <a:schemeClr val="bg1"/>
+                </a:solidFill>
+              </a:rPr>
               <a:t>and</a:t>
             </a:r>
             <a:r>
-              <a:rPr lang="nl-NL" dirty="0"/>
+              <a:rPr lang="nl-NL" dirty="0">
+                <a:solidFill>
+                  <a:schemeClr val="bg1"/>
+                </a:solidFill>
+              </a:rPr>
               <a:t> </a:t>
             </a:r>
             <a:r>
-              <a:rPr lang="nl-NL" dirty="0" err="1"/>
+              <a:rPr lang="nl-NL" dirty="0" err="1">
+                <a:solidFill>
+                  <a:schemeClr val="bg1"/>
+                </a:solidFill>
+              </a:rPr>
               <a:t>write</a:t>
             </a:r>
             <a:r>
-              <a:rPr lang="nl-NL" dirty="0"/>
+              <a:rPr lang="nl-NL" dirty="0">
+                <a:solidFill>
+                  <a:schemeClr val="bg1"/>
+                </a:solidFill>
+              </a:rPr>
               <a:t> </a:t>
             </a:r>
             <a:r>
-              <a:rPr lang="nl-NL" dirty="0" err="1"/>
+              <a:rPr lang="nl-NL" dirty="0" err="1">
+                <a:solidFill>
+                  <a:schemeClr val="bg1"/>
+                </a:solidFill>
+              </a:rPr>
               <a:t>results</a:t>
             </a:r>
             <a:r>
-              <a:rPr lang="nl-NL" dirty="0"/>
+              <a:rPr lang="nl-NL" dirty="0">
+                <a:solidFill>
+                  <a:schemeClr val="bg1"/>
+                </a:solidFill>
+              </a:rPr>
               <a:t> in output matrix</a:t>
             </a:r>
           </a:p>
@@ -12018,7 +12762,11 @@
               <a:buAutoNum type="arabicPeriod"/>
             </a:pPr>
             <a:r>
-              <a:rPr lang="nl-NL" dirty="0"/>
+              <a:rPr lang="nl-NL" dirty="0">
+                <a:solidFill>
+                  <a:schemeClr val="bg1"/>
+                </a:solidFill>
+              </a:rPr>
               <a:t>Profit!</a:t>
             </a:r>
           </a:p>
@@ -13191,166 +13939,6 @@
             <a:r>
               <a:rPr lang="nl-NL" dirty="0"/>
               <a:t> output model)</a:t>
-            </a:r>
-          </a:p>
-          <a:p>
-            <a:pPr marL="546100" indent="-457200">
-              <a:spcBef>
-                <a:spcPts val="800"/>
-              </a:spcBef>
-              <a:buSzPts val="2200"/>
-              <a:buFont typeface="+mj-lt"/>
-              <a:buAutoNum type="arabicPeriod"/>
-            </a:pPr>
-            <a:r>
-              <a:rPr lang="nl-NL" dirty="0"/>
-              <a:t>Run input </a:t>
-            </a:r>
-            <a:r>
-              <a:rPr lang="nl-NL" dirty="0" err="1"/>
-              <a:t>function</a:t>
-            </a:r>
-            <a:r>
-              <a:rPr lang="nl-NL" dirty="0"/>
-              <a:t> </a:t>
-            </a:r>
-            <a:r>
-              <a:rPr lang="nl-NL" i="1" dirty="0" err="1"/>
-              <a:t>n.sim</a:t>
-            </a:r>
-            <a:r>
-              <a:rPr lang="nl-NL" dirty="0" err="1"/>
-              <a:t>-times</a:t>
-            </a:r>
-            <a:r>
-              <a:rPr lang="nl-NL" dirty="0"/>
-              <a:t> (draws </a:t>
-            </a:r>
-            <a:r>
-              <a:rPr lang="nl-NL" dirty="0" err="1"/>
-              <a:t>from</a:t>
-            </a:r>
-            <a:r>
-              <a:rPr lang="nl-NL" dirty="0"/>
-              <a:t> </a:t>
-            </a:r>
-            <a:r>
-              <a:rPr lang="nl-NL" dirty="0" err="1"/>
-              <a:t>distributions</a:t>
-            </a:r>
-            <a:r>
-              <a:rPr lang="nl-NL" dirty="0"/>
-              <a:t>)</a:t>
-            </a:r>
-          </a:p>
-          <a:p>
-            <a:pPr marL="546100" indent="-457200">
-              <a:spcBef>
-                <a:spcPts val="800"/>
-              </a:spcBef>
-              <a:buSzPts val="2200"/>
-              <a:buFont typeface="+mj-lt"/>
-              <a:buAutoNum type="arabicPeriod"/>
-            </a:pPr>
-            <a:r>
-              <a:rPr lang="nl-NL" dirty="0" err="1"/>
-              <a:t>Initialize</a:t>
-            </a:r>
-            <a:r>
-              <a:rPr lang="nl-NL" dirty="0"/>
-              <a:t> output matrix</a:t>
-            </a:r>
-          </a:p>
-          <a:p>
-            <a:pPr marL="546100" indent="-457200">
-              <a:spcBef>
-                <a:spcPts val="800"/>
-              </a:spcBef>
-              <a:buSzPts val="2200"/>
-              <a:buFont typeface="+mj-lt"/>
-              <a:buAutoNum type="arabicPeriod"/>
-            </a:pPr>
-            <a:r>
-              <a:rPr lang="nl-NL" dirty="0"/>
-              <a:t>Run model </a:t>
-            </a:r>
-            <a:r>
-              <a:rPr lang="nl-NL" dirty="0" err="1"/>
-              <a:t>function</a:t>
-            </a:r>
-            <a:r>
-              <a:rPr lang="nl-NL" dirty="0"/>
-              <a:t> </a:t>
-            </a:r>
-            <a:r>
-              <a:rPr lang="nl-NL" dirty="0" err="1"/>
-              <a:t>with</a:t>
-            </a:r>
-            <a:r>
-              <a:rPr lang="nl-NL" dirty="0"/>
-              <a:t> </a:t>
-            </a:r>
-            <a:r>
-              <a:rPr lang="nl-NL" dirty="0" err="1"/>
-              <a:t>result</a:t>
-            </a:r>
-            <a:r>
-              <a:rPr lang="nl-NL" dirty="0"/>
-              <a:t> </a:t>
-            </a:r>
-            <a:r>
-              <a:rPr lang="nl-NL" dirty="0" err="1"/>
-              <a:t>from</a:t>
-            </a:r>
-            <a:r>
-              <a:rPr lang="nl-NL" dirty="0"/>
-              <a:t> input </a:t>
-            </a:r>
-            <a:r>
-              <a:rPr lang="nl-NL" dirty="0" err="1"/>
-              <a:t>function</a:t>
-            </a:r>
-            <a:r>
-              <a:rPr lang="nl-NL" dirty="0"/>
-              <a:t> </a:t>
-            </a:r>
-            <a:r>
-              <a:rPr lang="nl-NL" dirty="0" err="1"/>
-              <a:t>and</a:t>
-            </a:r>
-            <a:r>
-              <a:rPr lang="nl-NL" dirty="0"/>
-              <a:t> </a:t>
-            </a:r>
-            <a:r>
-              <a:rPr lang="nl-NL" dirty="0" err="1"/>
-              <a:t>write</a:t>
-            </a:r>
-            <a:r>
-              <a:rPr lang="nl-NL" dirty="0"/>
-              <a:t> </a:t>
-            </a:r>
-            <a:r>
-              <a:rPr lang="nl-NL" dirty="0" err="1"/>
-              <a:t>results</a:t>
-            </a:r>
-            <a:r>
-              <a:rPr lang="nl-NL" dirty="0"/>
-              <a:t> in output matrix</a:t>
-            </a:r>
-          </a:p>
-          <a:p>
-            <a:pPr marL="546100" indent="-457200">
-              <a:spcBef>
-                <a:spcPts val="800"/>
-              </a:spcBef>
-              <a:buSzPts val="2200"/>
-              <a:buFont typeface="+mj-lt"/>
-              <a:buAutoNum type="arabicPeriod"/>
-            </a:pPr>
-            <a:r>
-              <a:rPr lang="nl-NL" dirty="0"/>
-              <a:t>Profit!</a:t>
             </a:r>
           </a:p>
           <a:p>
